--- a/slides/slide-02.pptx
+++ b/slides/slide-02.pptx
@@ -4366,8 +4366,8 @@
         </p:nvSpPr>
         <p:spPr>
           <a:xfrm xmlns:a="http://schemas.openxmlformats.org/drawingml/2006/main">
-            <a:off x="609480" y="571680"/>
-            <a:ext cx="10667520" cy="1352160"/>
+            <a:off x="609600" y="609600"/>
+            <a:ext cx="10972800" cy="1295400"/>
           </a:xfrm>
           <a:prstGeom xmlns:a="http://schemas.openxmlformats.org/drawingml/2006/main" prst="rect">
             <a:avLst/>
@@ -4388,8 +4388,8 @@
             <a:noAutofit/>
           </a:bodyPr>
           <a:lstStyle xmlns:a="http://schemas.openxmlformats.org/drawingml/2006/main">
-            <a:defPPr>
-              <a:defRPr>
+            <a:defPPr algn="l">
+              <a:defRPr sz="3600">
                 <a:solidFill>
                   <a:srgbClr val="F7F7F2"/>
                 </a:solidFill>
@@ -4398,9 +4398,9 @@
                 <a:cs typeface="HarmonyOS Sans SC"/>
               </a:defRPr>
             </a:defPPr>
-            <a:lvl1pPr>
-              <a:buNone/>
-              <a:defRPr>
+            <a:lvl1pPr algn="l">
+              <a:buNone/>
+              <a:defRPr sz="3600">
                 <a:solidFill>
                   <a:srgbClr val="F7F7F2"/>
                 </a:solidFill>
@@ -4409,9 +4409,9 @@
                 <a:cs typeface="HarmonyOS Sans SC"/>
               </a:defRPr>
             </a:lvl1pPr>
-            <a:lvl2pPr>
-              <a:buNone/>
-              <a:defRPr>
+            <a:lvl2pPr algn="l">
+              <a:buNone/>
+              <a:defRPr sz="3600">
                 <a:solidFill>
                   <a:srgbClr val="F7F7F2"/>
                 </a:solidFill>
@@ -4420,9 +4420,9 @@
                 <a:cs typeface="HarmonyOS Sans SC"/>
               </a:defRPr>
             </a:lvl2pPr>
-            <a:lvl3pPr>
-              <a:buNone/>
-              <a:defRPr>
+            <a:lvl3pPr algn="l">
+              <a:buNone/>
+              <a:defRPr sz="3600">
                 <a:solidFill>
                   <a:srgbClr val="F7F7F2"/>
                 </a:solidFill>
@@ -4431,9 +4431,9 @@
                 <a:cs typeface="HarmonyOS Sans SC"/>
               </a:defRPr>
             </a:lvl3pPr>
-            <a:lvl4pPr>
-              <a:buNone/>
-              <a:defRPr>
+            <a:lvl4pPr algn="l">
+              <a:buNone/>
+              <a:defRPr sz="3600">
                 <a:solidFill>
                   <a:srgbClr val="F7F7F2"/>
                 </a:solidFill>
@@ -4442,9 +4442,9 @@
                 <a:cs typeface="HarmonyOS Sans SC"/>
               </a:defRPr>
             </a:lvl4pPr>
-            <a:lvl5pPr>
-              <a:buNone/>
-              <a:defRPr>
+            <a:lvl5pPr algn="l">
+              <a:buNone/>
+              <a:defRPr sz="3600">
                 <a:solidFill>
                   <a:srgbClr val="F7F7F2"/>
                 </a:solidFill>
@@ -4453,9 +4453,9 @@
                 <a:cs typeface="HarmonyOS Sans SC"/>
               </a:defRPr>
             </a:lvl5pPr>
-            <a:lvl6pPr>
-              <a:buNone/>
-              <a:defRPr>
+            <a:lvl6pPr algn="l">
+              <a:buNone/>
+              <a:defRPr sz="3600">
                 <a:solidFill>
                   <a:srgbClr val="F7F7F2"/>
                 </a:solidFill>
@@ -4464,9 +4464,9 @@
                 <a:cs typeface="HarmonyOS Sans SC"/>
               </a:defRPr>
             </a:lvl6pPr>
-            <a:lvl7pPr>
-              <a:buNone/>
-              <a:defRPr>
+            <a:lvl7pPr algn="l">
+              <a:buNone/>
+              <a:defRPr sz="3600">
                 <a:solidFill>
                   <a:srgbClr val="F7F7F2"/>
                 </a:solidFill>
@@ -4475,9 +4475,9 @@
                 <a:cs typeface="HarmonyOS Sans SC"/>
               </a:defRPr>
             </a:lvl7pPr>
-            <a:lvl8pPr>
-              <a:buNone/>
-              <a:defRPr>
+            <a:lvl8pPr algn="l">
+              <a:buNone/>
+              <a:defRPr sz="3600">
                 <a:solidFill>
                   <a:srgbClr val="F7F7F2"/>
                 </a:solidFill>
@@ -4486,9 +4486,9 @@
                 <a:cs typeface="HarmonyOS Sans SC"/>
               </a:defRPr>
             </a:lvl8pPr>
-            <a:lvl9pPr>
-              <a:buNone/>
-              <a:defRPr>
+            <a:lvl9pPr algn="l">
+              <a:buNone/>
+              <a:defRPr sz="3600">
                 <a:solidFill>
                   <a:srgbClr val="F7F7F2"/>
                 </a:solidFill>
@@ -4499,12 +4499,12 @@
             </a:lvl9pPr>
           </a:lstStyle>
           <a:p xmlns:a="http://schemas.openxmlformats.org/drawingml/2006/main">
-            <a:pPr>
+            <a:pPr algn="l">
               <a:lnSpc>
                 <a:spcPct val="116000"/>
               </a:lnSpc>
               <a:buNone/>
-              <a:defRPr>
+              <a:defRPr sz="3600">
                 <a:solidFill>
                   <a:srgbClr val="F7F7F2"/>
                 </a:solidFill>
@@ -4514,7 +4514,7 @@
               </a:defRPr>
             </a:pPr>
             <a:r>
-              <a:rPr sz="3900" b="1" u="none" strike="noStrike">
+              <a:rPr sz="3600" b="1" u="none" strike="noStrike">
                 <a:solidFill>
                   <a:srgbClr val="F7F7F2"/>
                 </a:solidFill>
@@ -4534,12 +4534,12 @@
             </a:endParaRPr>
           </a:p>
           <a:p xmlns:a="http://schemas.openxmlformats.org/drawingml/2006/main">
-            <a:pPr>
+            <a:pPr algn="l">
               <a:lnSpc>
                 <a:spcPct val="116000"/>
               </a:lnSpc>
               <a:buNone/>
-              <a:defRPr>
+              <a:defRPr sz="3600">
                 <a:solidFill>
                   <a:srgbClr val="F7F7F2"/>
                 </a:solidFill>
@@ -4549,7 +4549,7 @@
               </a:defRPr>
             </a:pPr>
             <a:r>
-              <a:rPr sz="3900" b="1" u="none" strike="noStrike">
+              <a:rPr sz="3600" b="1" u="none" strike="noStrike">
                 <a:solidFill>
                   <a:srgbClr val="F7F7F2"/>
                 </a:solidFill>
@@ -4586,8 +4586,8 @@
         </p:nvSpPr>
         <p:spPr>
           <a:xfrm xmlns:a="http://schemas.openxmlformats.org/drawingml/2006/main">
-            <a:off x="609480" y="2400480"/>
-            <a:ext cx="5428800" cy="809280"/>
+            <a:off x="609600" y="2362200"/>
+            <a:ext cx="5372100" cy="838200"/>
           </a:xfrm>
           <a:prstGeom xmlns:a="http://schemas.openxmlformats.org/drawingml/2006/main" prst="rect">
             <a:avLst/>
@@ -4608,8 +4608,19 @@
             <a:noAutofit/>
           </a:bodyPr>
           <a:lstStyle xmlns:a="http://schemas.openxmlformats.org/drawingml/2006/main">
-            <a:defPPr>
-              <a:defRPr>
+            <a:defPPr algn="l">
+              <a:defRPr sz="4800">
+                <a:solidFill>
+                  <a:srgbClr val="65E8D4"/>
+                </a:solidFill>
+                <a:latin typeface="HarmonyOS Sans SC"/>
+                <a:ea typeface="HarmonyOS Sans SC"/>
+                <a:cs typeface="HarmonyOS Sans SC"/>
+              </a:defRPr>
+            </a:defPPr>
+            <a:lvl1pPr algn="l">
+              <a:buNone/>
+              <a:defRPr sz="4800">
                 <a:solidFill>
                   <a:srgbClr val="F7F7F2"/>
                 </a:solidFill>
@@ -4617,10 +4628,10 @@
                 <a:ea typeface="HarmonyOS Sans SC"/>
                 <a:cs typeface="HarmonyOS Sans SC"/>
               </a:defRPr>
-            </a:defPPr>
-            <a:lvl1pPr>
-              <a:buNone/>
-              <a:defRPr>
+            </a:lvl1pPr>
+            <a:lvl2pPr algn="l">
+              <a:buNone/>
+              <a:defRPr sz="4800">
                 <a:solidFill>
                   <a:srgbClr val="F7F7F2"/>
                 </a:solidFill>
@@ -4628,10 +4639,10 @@
                 <a:ea typeface="HarmonyOS Sans SC"/>
                 <a:cs typeface="HarmonyOS Sans SC"/>
               </a:defRPr>
-            </a:lvl1pPr>
-            <a:lvl2pPr>
-              <a:buNone/>
-              <a:defRPr>
+            </a:lvl2pPr>
+            <a:lvl3pPr algn="l">
+              <a:buNone/>
+              <a:defRPr sz="4800">
                 <a:solidFill>
                   <a:srgbClr val="F7F7F2"/>
                 </a:solidFill>
@@ -4639,10 +4650,10 @@
                 <a:ea typeface="HarmonyOS Sans SC"/>
                 <a:cs typeface="HarmonyOS Sans SC"/>
               </a:defRPr>
-            </a:lvl2pPr>
-            <a:lvl3pPr>
-              <a:buNone/>
-              <a:defRPr>
+            </a:lvl3pPr>
+            <a:lvl4pPr algn="l">
+              <a:buNone/>
+              <a:defRPr sz="4800">
                 <a:solidFill>
                   <a:srgbClr val="F7F7F2"/>
                 </a:solidFill>
@@ -4650,10 +4661,10 @@
                 <a:ea typeface="HarmonyOS Sans SC"/>
                 <a:cs typeface="HarmonyOS Sans SC"/>
               </a:defRPr>
-            </a:lvl3pPr>
-            <a:lvl4pPr>
-              <a:buNone/>
-              <a:defRPr>
+            </a:lvl4pPr>
+            <a:lvl5pPr algn="l">
+              <a:buNone/>
+              <a:defRPr sz="4800">
                 <a:solidFill>
                   <a:srgbClr val="F7F7F2"/>
                 </a:solidFill>
@@ -4661,10 +4672,10 @@
                 <a:ea typeface="HarmonyOS Sans SC"/>
                 <a:cs typeface="HarmonyOS Sans SC"/>
               </a:defRPr>
-            </a:lvl4pPr>
-            <a:lvl5pPr>
-              <a:buNone/>
-              <a:defRPr>
+            </a:lvl5pPr>
+            <a:lvl6pPr algn="l">
+              <a:buNone/>
+              <a:defRPr sz="4800">
                 <a:solidFill>
                   <a:srgbClr val="F7F7F2"/>
                 </a:solidFill>
@@ -4672,10 +4683,10 @@
                 <a:ea typeface="HarmonyOS Sans SC"/>
                 <a:cs typeface="HarmonyOS Sans SC"/>
               </a:defRPr>
-            </a:lvl5pPr>
-            <a:lvl6pPr>
-              <a:buNone/>
-              <a:defRPr>
+            </a:lvl6pPr>
+            <a:lvl7pPr algn="l">
+              <a:buNone/>
+              <a:defRPr sz="4800">
                 <a:solidFill>
                   <a:srgbClr val="F7F7F2"/>
                 </a:solidFill>
@@ -4683,10 +4694,10 @@
                 <a:ea typeface="HarmonyOS Sans SC"/>
                 <a:cs typeface="HarmonyOS Sans SC"/>
               </a:defRPr>
-            </a:lvl6pPr>
-            <a:lvl7pPr>
-              <a:buNone/>
-              <a:defRPr>
+            </a:lvl7pPr>
+            <a:lvl8pPr algn="l">
+              <a:buNone/>
+              <a:defRPr sz="4800">
                 <a:solidFill>
                   <a:srgbClr val="F7F7F2"/>
                 </a:solidFill>
@@ -4694,21 +4705,10 @@
                 <a:ea typeface="HarmonyOS Sans SC"/>
                 <a:cs typeface="HarmonyOS Sans SC"/>
               </a:defRPr>
-            </a:lvl7pPr>
-            <a:lvl8pPr>
-              <a:buNone/>
-              <a:defRPr>
-                <a:solidFill>
-                  <a:srgbClr val="F7F7F2"/>
-                </a:solidFill>
-                <a:latin typeface="HarmonyOS Sans SC"/>
-                <a:ea typeface="HarmonyOS Sans SC"/>
-                <a:cs typeface="HarmonyOS Sans SC"/>
-              </a:defRPr>
             </a:lvl8pPr>
-            <a:lvl9pPr>
-              <a:buNone/>
-              <a:defRPr>
+            <a:lvl9pPr algn="l">
+              <a:buNone/>
+              <a:defRPr sz="4800">
                 <a:solidFill>
                   <a:srgbClr val="F7F7F2"/>
                 </a:solidFill>
@@ -4719,14 +4719,14 @@
             </a:lvl9pPr>
           </a:lstStyle>
           <a:p xmlns:a="http://schemas.openxmlformats.org/drawingml/2006/main">
-            <a:pPr>
+            <a:pPr algn="l">
               <a:lnSpc>
                 <a:spcPct val="116000"/>
               </a:lnSpc>
               <a:buNone/>
-              <a:defRPr>
-                <a:solidFill>
-                  <a:srgbClr val="F7F7F2"/>
+              <a:defRPr sz="4800">
+                <a:solidFill>
+                  <a:srgbClr val="65E8D4"/>
                 </a:solidFill>
                 <a:latin typeface="HarmonyOS Sans SC"/>
                 <a:ea typeface="HarmonyOS Sans SC"/>
@@ -4736,7 +4736,7 @@
             <a:r>
               <a:rPr sz="4800" b="1" u="none" strike="noStrike">
                 <a:solidFill>
-                  <a:srgbClr val="F7F7F2"/>
+                  <a:srgbClr val="65E8D4"/>
                 </a:solidFill>
                 <a:latin typeface="HarmonyOS Sans SC"/>
                 <a:ea typeface="HarmonyOS Sans SC"/>
@@ -4771,8 +4771,8 @@
         </p:nvSpPr>
         <p:spPr>
           <a:xfrm xmlns:a="http://schemas.openxmlformats.org/drawingml/2006/main">
-            <a:off x="638280" y="3438360"/>
-            <a:ext cx="5285880" cy="475920"/>
+            <a:off x="609600" y="3352800"/>
+            <a:ext cx="5372100" cy="457200"/>
           </a:xfrm>
           <a:prstGeom xmlns:a="http://schemas.openxmlformats.org/drawingml/2006/main" prst="rect">
             <a:avLst/>
@@ -4793,8 +4793,8 @@
             <a:noAutofit/>
           </a:bodyPr>
           <a:lstStyle xmlns:a="http://schemas.openxmlformats.org/drawingml/2006/main">
-            <a:defPPr>
-              <a:defRPr>
+            <a:defPPr algn="l">
+              <a:defRPr sz="2100">
                 <a:solidFill>
                   <a:srgbClr val="F7F7F2"/>
                 </a:solidFill>
@@ -4803,9 +4803,9 @@
                 <a:cs typeface="HarmonyOS Sans SC"/>
               </a:defRPr>
             </a:defPPr>
-            <a:lvl1pPr>
-              <a:buNone/>
-              <a:defRPr>
+            <a:lvl1pPr algn="l">
+              <a:buNone/>
+              <a:defRPr sz="2100">
                 <a:solidFill>
                   <a:srgbClr val="F7F7F2"/>
                 </a:solidFill>
@@ -4814,9 +4814,9 @@
                 <a:cs typeface="HarmonyOS Sans SC"/>
               </a:defRPr>
             </a:lvl1pPr>
-            <a:lvl2pPr>
-              <a:buNone/>
-              <a:defRPr>
+            <a:lvl2pPr algn="l">
+              <a:buNone/>
+              <a:defRPr sz="2100">
                 <a:solidFill>
                   <a:srgbClr val="F7F7F2"/>
                 </a:solidFill>
@@ -4825,9 +4825,9 @@
                 <a:cs typeface="HarmonyOS Sans SC"/>
               </a:defRPr>
             </a:lvl2pPr>
-            <a:lvl3pPr>
-              <a:buNone/>
-              <a:defRPr>
+            <a:lvl3pPr algn="l">
+              <a:buNone/>
+              <a:defRPr sz="2100">
                 <a:solidFill>
                   <a:srgbClr val="F7F7F2"/>
                 </a:solidFill>
@@ -4836,9 +4836,9 @@
                 <a:cs typeface="HarmonyOS Sans SC"/>
               </a:defRPr>
             </a:lvl3pPr>
-            <a:lvl4pPr>
-              <a:buNone/>
-              <a:defRPr>
+            <a:lvl4pPr algn="l">
+              <a:buNone/>
+              <a:defRPr sz="2100">
                 <a:solidFill>
                   <a:srgbClr val="F7F7F2"/>
                 </a:solidFill>
@@ -4847,9 +4847,9 @@
                 <a:cs typeface="HarmonyOS Sans SC"/>
               </a:defRPr>
             </a:lvl4pPr>
-            <a:lvl5pPr>
-              <a:buNone/>
-              <a:defRPr>
+            <a:lvl5pPr algn="l">
+              <a:buNone/>
+              <a:defRPr sz="2100">
                 <a:solidFill>
                   <a:srgbClr val="F7F7F2"/>
                 </a:solidFill>
@@ -4858,9 +4858,9 @@
                 <a:cs typeface="HarmonyOS Sans SC"/>
               </a:defRPr>
             </a:lvl5pPr>
-            <a:lvl6pPr>
-              <a:buNone/>
-              <a:defRPr>
+            <a:lvl6pPr algn="l">
+              <a:buNone/>
+              <a:defRPr sz="2100">
                 <a:solidFill>
                   <a:srgbClr val="F7F7F2"/>
                 </a:solidFill>
@@ -4869,9 +4869,9 @@
                 <a:cs typeface="HarmonyOS Sans SC"/>
               </a:defRPr>
             </a:lvl6pPr>
-            <a:lvl7pPr>
-              <a:buNone/>
-              <a:defRPr>
+            <a:lvl7pPr algn="l">
+              <a:buNone/>
+              <a:defRPr sz="2100">
                 <a:solidFill>
                   <a:srgbClr val="F7F7F2"/>
                 </a:solidFill>
@@ -4880,9 +4880,9 @@
                 <a:cs typeface="HarmonyOS Sans SC"/>
               </a:defRPr>
             </a:lvl7pPr>
-            <a:lvl8pPr>
-              <a:buNone/>
-              <a:defRPr>
+            <a:lvl8pPr algn="l">
+              <a:buNone/>
+              <a:defRPr sz="2100">
                 <a:solidFill>
                   <a:srgbClr val="F7F7F2"/>
                 </a:solidFill>
@@ -4891,9 +4891,9 @@
                 <a:cs typeface="HarmonyOS Sans SC"/>
               </a:defRPr>
             </a:lvl8pPr>
-            <a:lvl9pPr>
-              <a:buNone/>
-              <a:defRPr>
+            <a:lvl9pPr algn="l">
+              <a:buNone/>
+              <a:defRPr sz="2100">
                 <a:solidFill>
                   <a:srgbClr val="F7F7F2"/>
                 </a:solidFill>
@@ -4904,12 +4904,12 @@
             </a:lvl9pPr>
           </a:lstStyle>
           <a:p xmlns:a="http://schemas.openxmlformats.org/drawingml/2006/main">
-            <a:pPr>
+            <a:pPr algn="l">
               <a:lnSpc>
                 <a:spcPct val="116000"/>
               </a:lnSpc>
               <a:buNone/>
-              <a:defRPr>
+              <a:defRPr sz="2100">
                 <a:solidFill>
                   <a:srgbClr val="F7F7F2"/>
                 </a:solidFill>
@@ -4919,7 +4919,7 @@
               </a:defRPr>
             </a:pPr>
             <a:r>
-              <a:rPr sz="2250" b="0" u="none" strike="noStrike">
+              <a:rPr sz="2100" b="0" u="none" strike="noStrike">
                 <a:solidFill>
                   <a:srgbClr val="F7F7F2"/>
                 </a:solidFill>
@@ -4956,8 +4956,8 @@
         </p:nvSpPr>
         <p:spPr>
           <a:xfrm xmlns:a="http://schemas.openxmlformats.org/drawingml/2006/main">
-            <a:off x="638280" y="4514760"/>
-            <a:ext cx="3809520" cy="304560"/>
+            <a:off x="609600" y="4495800"/>
+            <a:ext cx="5372100" cy="304800"/>
           </a:xfrm>
           <a:prstGeom xmlns:a="http://schemas.openxmlformats.org/drawingml/2006/main" prst="rect">
             <a:avLst/>
@@ -4978,8 +4978,8 @@
             <a:noAutofit/>
           </a:bodyPr>
           <a:lstStyle xmlns:a="http://schemas.openxmlformats.org/drawingml/2006/main">
-            <a:defPPr>
-              <a:defRPr>
+            <a:defPPr algn="l">
+              <a:defRPr sz="1650">
                 <a:solidFill>
                   <a:srgbClr val="A6A7B2"/>
                 </a:solidFill>
@@ -4988,9 +4988,9 @@
                 <a:cs typeface="HarmonyOS Sans SC"/>
               </a:defRPr>
             </a:defPPr>
-            <a:lvl1pPr>
-              <a:buNone/>
-              <a:defRPr>
+            <a:lvl1pPr algn="l">
+              <a:buNone/>
+              <a:defRPr sz="1650">
                 <a:solidFill>
                   <a:srgbClr val="A6A7B2"/>
                 </a:solidFill>
@@ -4999,9 +4999,9 @@
                 <a:cs typeface="HarmonyOS Sans SC"/>
               </a:defRPr>
             </a:lvl1pPr>
-            <a:lvl2pPr>
-              <a:buNone/>
-              <a:defRPr>
+            <a:lvl2pPr algn="l">
+              <a:buNone/>
+              <a:defRPr sz="1650">
                 <a:solidFill>
                   <a:srgbClr val="A6A7B2"/>
                 </a:solidFill>
@@ -5010,9 +5010,9 @@
                 <a:cs typeface="HarmonyOS Sans SC"/>
               </a:defRPr>
             </a:lvl2pPr>
-            <a:lvl3pPr>
-              <a:buNone/>
-              <a:defRPr>
+            <a:lvl3pPr algn="l">
+              <a:buNone/>
+              <a:defRPr sz="1650">
                 <a:solidFill>
                   <a:srgbClr val="A6A7B2"/>
                 </a:solidFill>
@@ -5021,9 +5021,9 @@
                 <a:cs typeface="HarmonyOS Sans SC"/>
               </a:defRPr>
             </a:lvl3pPr>
-            <a:lvl4pPr>
-              <a:buNone/>
-              <a:defRPr>
+            <a:lvl4pPr algn="l">
+              <a:buNone/>
+              <a:defRPr sz="1650">
                 <a:solidFill>
                   <a:srgbClr val="A6A7B2"/>
                 </a:solidFill>
@@ -5032,9 +5032,9 @@
                 <a:cs typeface="HarmonyOS Sans SC"/>
               </a:defRPr>
             </a:lvl4pPr>
-            <a:lvl5pPr>
-              <a:buNone/>
-              <a:defRPr>
+            <a:lvl5pPr algn="l">
+              <a:buNone/>
+              <a:defRPr sz="1650">
                 <a:solidFill>
                   <a:srgbClr val="A6A7B2"/>
                 </a:solidFill>
@@ -5043,9 +5043,9 @@
                 <a:cs typeface="HarmonyOS Sans SC"/>
               </a:defRPr>
             </a:lvl5pPr>
-            <a:lvl6pPr>
-              <a:buNone/>
-              <a:defRPr>
+            <a:lvl6pPr algn="l">
+              <a:buNone/>
+              <a:defRPr sz="1650">
                 <a:solidFill>
                   <a:srgbClr val="A6A7B2"/>
                 </a:solidFill>
@@ -5054,9 +5054,9 @@
                 <a:cs typeface="HarmonyOS Sans SC"/>
               </a:defRPr>
             </a:lvl6pPr>
-            <a:lvl7pPr>
-              <a:buNone/>
-              <a:defRPr>
+            <a:lvl7pPr algn="l">
+              <a:buNone/>
+              <a:defRPr sz="1650">
                 <a:solidFill>
                   <a:srgbClr val="A6A7B2"/>
                 </a:solidFill>
@@ -5065,9 +5065,9 @@
                 <a:cs typeface="HarmonyOS Sans SC"/>
               </a:defRPr>
             </a:lvl7pPr>
-            <a:lvl8pPr>
-              <a:buNone/>
-              <a:defRPr>
+            <a:lvl8pPr algn="l">
+              <a:buNone/>
+              <a:defRPr sz="1650">
                 <a:solidFill>
                   <a:srgbClr val="A6A7B2"/>
                 </a:solidFill>
@@ -5076,9 +5076,9 @@
                 <a:cs typeface="HarmonyOS Sans SC"/>
               </a:defRPr>
             </a:lvl8pPr>
-            <a:lvl9pPr>
-              <a:buNone/>
-              <a:defRPr>
+            <a:lvl9pPr algn="l">
+              <a:buNone/>
+              <a:defRPr sz="1650">
                 <a:solidFill>
                   <a:srgbClr val="A6A7B2"/>
                 </a:solidFill>
@@ -5089,12 +5089,12 @@
             </a:lvl9pPr>
           </a:lstStyle>
           <a:p xmlns:a="http://schemas.openxmlformats.org/drawingml/2006/main">
-            <a:pPr>
+            <a:pPr algn="l">
               <a:lnSpc>
                 <a:spcPct val="116000"/>
               </a:lnSpc>
               <a:buNone/>
-              <a:defRPr>
+              <a:defRPr sz="1650">
                 <a:solidFill>
                   <a:srgbClr val="A6A7B2"/>
                 </a:solidFill>
@@ -5141,8 +5141,8 @@
         </p:nvSpPr>
         <p:spPr>
           <a:xfrm xmlns:a="http://schemas.openxmlformats.org/drawingml/2006/main">
-            <a:off x="638280" y="4952880"/>
-            <a:ext cx="5714640" cy="447480"/>
+            <a:off x="609600" y="4876800"/>
+            <a:ext cx="5372100" cy="457200"/>
           </a:xfrm>
           <a:prstGeom xmlns:a="http://schemas.openxmlformats.org/drawingml/2006/main" prst="rect">
             <a:avLst/>
@@ -5163,8 +5163,8 @@
             <a:noAutofit/>
           </a:bodyPr>
           <a:lstStyle xmlns:a="http://schemas.openxmlformats.org/drawingml/2006/main">
-            <a:defPPr>
-              <a:defRPr>
+            <a:defPPr algn="l">
+              <a:defRPr sz="2250">
                 <a:solidFill>
                   <a:srgbClr val="F7F7F2"/>
                 </a:solidFill>
@@ -5173,9 +5173,9 @@
                 <a:cs typeface="HarmonyOS Sans SC"/>
               </a:defRPr>
             </a:defPPr>
-            <a:lvl1pPr>
-              <a:buNone/>
-              <a:defRPr>
+            <a:lvl1pPr algn="l">
+              <a:buNone/>
+              <a:defRPr sz="2250">
                 <a:solidFill>
                   <a:srgbClr val="F7F7F2"/>
                 </a:solidFill>
@@ -5184,9 +5184,9 @@
                 <a:cs typeface="HarmonyOS Sans SC"/>
               </a:defRPr>
             </a:lvl1pPr>
-            <a:lvl2pPr>
-              <a:buNone/>
-              <a:defRPr>
+            <a:lvl2pPr algn="l">
+              <a:buNone/>
+              <a:defRPr sz="2250">
                 <a:solidFill>
                   <a:srgbClr val="F7F7F2"/>
                 </a:solidFill>
@@ -5195,9 +5195,9 @@
                 <a:cs typeface="HarmonyOS Sans SC"/>
               </a:defRPr>
             </a:lvl2pPr>
-            <a:lvl3pPr>
-              <a:buNone/>
-              <a:defRPr>
+            <a:lvl3pPr algn="l">
+              <a:buNone/>
+              <a:defRPr sz="2250">
                 <a:solidFill>
                   <a:srgbClr val="F7F7F2"/>
                 </a:solidFill>
@@ -5206,9 +5206,9 @@
                 <a:cs typeface="HarmonyOS Sans SC"/>
               </a:defRPr>
             </a:lvl3pPr>
-            <a:lvl4pPr>
-              <a:buNone/>
-              <a:defRPr>
+            <a:lvl4pPr algn="l">
+              <a:buNone/>
+              <a:defRPr sz="2250">
                 <a:solidFill>
                   <a:srgbClr val="F7F7F2"/>
                 </a:solidFill>
@@ -5217,9 +5217,9 @@
                 <a:cs typeface="HarmonyOS Sans SC"/>
               </a:defRPr>
             </a:lvl4pPr>
-            <a:lvl5pPr>
-              <a:buNone/>
-              <a:defRPr>
+            <a:lvl5pPr algn="l">
+              <a:buNone/>
+              <a:defRPr sz="2250">
                 <a:solidFill>
                   <a:srgbClr val="F7F7F2"/>
                 </a:solidFill>
@@ -5228,9 +5228,9 @@
                 <a:cs typeface="HarmonyOS Sans SC"/>
               </a:defRPr>
             </a:lvl5pPr>
-            <a:lvl6pPr>
-              <a:buNone/>
-              <a:defRPr>
+            <a:lvl6pPr algn="l">
+              <a:buNone/>
+              <a:defRPr sz="2250">
                 <a:solidFill>
                   <a:srgbClr val="F7F7F2"/>
                 </a:solidFill>
@@ -5239,9 +5239,9 @@
                 <a:cs typeface="HarmonyOS Sans SC"/>
               </a:defRPr>
             </a:lvl6pPr>
-            <a:lvl7pPr>
-              <a:buNone/>
-              <a:defRPr>
+            <a:lvl7pPr algn="l">
+              <a:buNone/>
+              <a:defRPr sz="2250">
                 <a:solidFill>
                   <a:srgbClr val="F7F7F2"/>
                 </a:solidFill>
@@ -5250,9 +5250,9 @@
                 <a:cs typeface="HarmonyOS Sans SC"/>
               </a:defRPr>
             </a:lvl7pPr>
-            <a:lvl8pPr>
-              <a:buNone/>
-              <a:defRPr>
+            <a:lvl8pPr algn="l">
+              <a:buNone/>
+              <a:defRPr sz="2250">
                 <a:solidFill>
                   <a:srgbClr val="F7F7F2"/>
                 </a:solidFill>
@@ -5261,9 +5261,9 @@
                 <a:cs typeface="HarmonyOS Sans SC"/>
               </a:defRPr>
             </a:lvl8pPr>
-            <a:lvl9pPr>
-              <a:buNone/>
-              <a:defRPr>
+            <a:lvl9pPr algn="l">
+              <a:buNone/>
+              <a:defRPr sz="2250">
                 <a:solidFill>
                   <a:srgbClr val="F7F7F2"/>
                 </a:solidFill>
@@ -5274,12 +5274,12 @@
             </a:lvl9pPr>
           </a:lstStyle>
           <a:p xmlns:a="http://schemas.openxmlformats.org/drawingml/2006/main">
-            <a:pPr>
+            <a:pPr algn="l">
               <a:lnSpc>
                 <a:spcPct val="116000"/>
               </a:lnSpc>
               <a:buNone/>
-              <a:defRPr>
+              <a:defRPr sz="2250">
                 <a:solidFill>
                   <a:srgbClr val="F7F7F2"/>
                 </a:solidFill>
@@ -5289,7 +5289,7 @@
               </a:defRPr>
             </a:pPr>
             <a:r>
-              <a:rPr sz="2400" b="1" u="none" strike="noStrike">
+              <a:rPr sz="2250" b="1" u="none" strike="noStrike">
                 <a:solidFill>
                   <a:srgbClr val="F7F7F2"/>
                 </a:solidFill>
@@ -5326,8 +5326,8 @@
         </p:nvSpPr>
         <p:spPr>
           <a:xfrm xmlns:a="http://schemas.openxmlformats.org/drawingml/2006/main">
-            <a:off x="638280" y="5543640"/>
-            <a:ext cx="6000480" cy="380520"/>
+            <a:off x="609600" y="5410200"/>
+            <a:ext cx="5372100" cy="685800"/>
           </a:xfrm>
           <a:prstGeom xmlns:a="http://schemas.openxmlformats.org/drawingml/2006/main" prst="rect">
             <a:avLst/>
@@ -5348,8 +5348,8 @@
             <a:noAutofit/>
           </a:bodyPr>
           <a:lstStyle xmlns:a="http://schemas.openxmlformats.org/drawingml/2006/main">
-            <a:defPPr>
-              <a:defRPr>
+            <a:defPPr algn="l">
+              <a:defRPr sz="1800">
                 <a:solidFill>
                   <a:srgbClr val="A6A7B2"/>
                 </a:solidFill>
@@ -5358,9 +5358,9 @@
                 <a:cs typeface="HarmonyOS Sans SC"/>
               </a:defRPr>
             </a:defPPr>
-            <a:lvl1pPr>
-              <a:buNone/>
-              <a:defRPr>
+            <a:lvl1pPr algn="l">
+              <a:buNone/>
+              <a:defRPr sz="1800">
                 <a:solidFill>
                   <a:srgbClr val="A6A7B2"/>
                 </a:solidFill>
@@ -5369,9 +5369,9 @@
                 <a:cs typeface="HarmonyOS Sans SC"/>
               </a:defRPr>
             </a:lvl1pPr>
-            <a:lvl2pPr>
-              <a:buNone/>
-              <a:defRPr>
+            <a:lvl2pPr algn="l">
+              <a:buNone/>
+              <a:defRPr sz="1800">
                 <a:solidFill>
                   <a:srgbClr val="A6A7B2"/>
                 </a:solidFill>
@@ -5380,9 +5380,9 @@
                 <a:cs typeface="HarmonyOS Sans SC"/>
               </a:defRPr>
             </a:lvl2pPr>
-            <a:lvl3pPr>
-              <a:buNone/>
-              <a:defRPr>
+            <a:lvl3pPr algn="l">
+              <a:buNone/>
+              <a:defRPr sz="1800">
                 <a:solidFill>
                   <a:srgbClr val="A6A7B2"/>
                 </a:solidFill>
@@ -5391,9 +5391,9 @@
                 <a:cs typeface="HarmonyOS Sans SC"/>
               </a:defRPr>
             </a:lvl3pPr>
-            <a:lvl4pPr>
-              <a:buNone/>
-              <a:defRPr>
+            <a:lvl4pPr algn="l">
+              <a:buNone/>
+              <a:defRPr sz="1800">
                 <a:solidFill>
                   <a:srgbClr val="A6A7B2"/>
                 </a:solidFill>
@@ -5402,9 +5402,9 @@
                 <a:cs typeface="HarmonyOS Sans SC"/>
               </a:defRPr>
             </a:lvl4pPr>
-            <a:lvl5pPr>
-              <a:buNone/>
-              <a:defRPr>
+            <a:lvl5pPr algn="l">
+              <a:buNone/>
+              <a:defRPr sz="1800">
                 <a:solidFill>
                   <a:srgbClr val="A6A7B2"/>
                 </a:solidFill>
@@ -5413,9 +5413,9 @@
                 <a:cs typeface="HarmonyOS Sans SC"/>
               </a:defRPr>
             </a:lvl5pPr>
-            <a:lvl6pPr>
-              <a:buNone/>
-              <a:defRPr>
+            <a:lvl6pPr algn="l">
+              <a:buNone/>
+              <a:defRPr sz="1800">
                 <a:solidFill>
                   <a:srgbClr val="A6A7B2"/>
                 </a:solidFill>
@@ -5424,9 +5424,9 @@
                 <a:cs typeface="HarmonyOS Sans SC"/>
               </a:defRPr>
             </a:lvl6pPr>
-            <a:lvl7pPr>
-              <a:buNone/>
-              <a:defRPr>
+            <a:lvl7pPr algn="l">
+              <a:buNone/>
+              <a:defRPr sz="1800">
                 <a:solidFill>
                   <a:srgbClr val="A6A7B2"/>
                 </a:solidFill>
@@ -5435,9 +5435,9 @@
                 <a:cs typeface="HarmonyOS Sans SC"/>
               </a:defRPr>
             </a:lvl7pPr>
-            <a:lvl8pPr>
-              <a:buNone/>
-              <a:defRPr>
+            <a:lvl8pPr algn="l">
+              <a:buNone/>
+              <a:defRPr sz="1800">
                 <a:solidFill>
                   <a:srgbClr val="A6A7B2"/>
                 </a:solidFill>
@@ -5446,9 +5446,9 @@
                 <a:cs typeface="HarmonyOS Sans SC"/>
               </a:defRPr>
             </a:lvl8pPr>
-            <a:lvl9pPr>
-              <a:buNone/>
-              <a:defRPr>
+            <a:lvl9pPr algn="l">
+              <a:buNone/>
+              <a:defRPr sz="1800">
                 <a:solidFill>
                   <a:srgbClr val="A6A7B2"/>
                 </a:solidFill>
@@ -5459,12 +5459,12 @@
             </a:lvl9pPr>
           </a:lstStyle>
           <a:p xmlns:a="http://schemas.openxmlformats.org/drawingml/2006/main">
-            <a:pPr>
+            <a:pPr algn="l">
               <a:lnSpc>
                 <a:spcPct val="116000"/>
               </a:lnSpc>
               <a:buNone/>
-              <a:defRPr>
+              <a:defRPr sz="1800">
                 <a:solidFill>
                   <a:srgbClr val="A6A7B2"/>
                 </a:solidFill>
@@ -5474,7 +5474,7 @@
               </a:defRPr>
             </a:pPr>
             <a:r>
-              <a:rPr sz="1870" b="0" u="none" strike="noStrike">
+              <a:rPr sz="1800" b="0" u="none" strike="noStrike">
                 <a:solidFill>
                   <a:srgbClr val="A6A7B2"/>
                 </a:solidFill>
@@ -5485,7 +5485,7 @@
               <a:t>社区定制固件，明确采用 </a:t>
             </a:r>
             <a:r>
-              <a:rPr sz="1870" b="0" u="none" strike="noStrike">
+              <a:rPr sz="1800" b="0" u="none" strike="noStrike">
                 <a:solidFill>
                   <a:srgbClr val="A6A7B2"/>
                 </a:solidFill>
@@ -5496,7 +5496,7 @@
               <a:t>AI </a:t>
             </a:r>
             <a:r>
-              <a:rPr sz="1870" b="0" u="none" strike="noStrike">
+              <a:rPr sz="1800" b="0" u="none" strike="noStrike">
                 <a:solidFill>
                   <a:srgbClr val="A6A7B2"/>
                 </a:solidFill>
@@ -5538,8 +5538,8 @@
         </p:blipFill>
         <p:spPr>
           <a:xfrm xmlns:a="http://schemas.openxmlformats.org/drawingml/2006/main">
-            <a:off x="6991200" y="2286000"/>
-            <a:ext cx="4333680" cy="2685600"/>
+            <a:off x="7143750" y="2362200"/>
+            <a:ext cx="4438650" cy="2750650"/>
           </a:xfrm>
           <a:prstGeom xmlns:a="http://schemas.openxmlformats.org/drawingml/2006/main" prst="rect">
             <a:avLst/>
@@ -5565,8 +5565,8 @@
         </p:nvSpPr>
         <p:spPr>
           <a:xfrm xmlns:a="http://schemas.openxmlformats.org/drawingml/2006/main">
-            <a:off x="7095960" y="5238720"/>
-            <a:ext cx="4190760" cy="285480"/>
+            <a:off x="7143750" y="5410200"/>
+            <a:ext cx="4438650" cy="381000"/>
           </a:xfrm>
           <a:prstGeom xmlns:a="http://schemas.openxmlformats.org/drawingml/2006/main" prst="rect">
             <a:avLst/>
@@ -5587,8 +5587,19 @@
             <a:noAutofit/>
           </a:bodyPr>
           <a:lstStyle xmlns:a="http://schemas.openxmlformats.org/drawingml/2006/main">
-            <a:defPPr>
-              <a:defRPr>
+            <a:defPPr algn="l">
+              <a:defRPr sz="1650">
+                <a:solidFill>
+                  <a:srgbClr val="65E8D4"/>
+                </a:solidFill>
+                <a:latin typeface="HarmonyOS Sans SC"/>
+                <a:ea typeface="HarmonyOS Sans SC"/>
+                <a:cs typeface="HarmonyOS Sans SC"/>
+              </a:defRPr>
+            </a:defPPr>
+            <a:lvl1pPr algn="l">
+              <a:buNone/>
+              <a:defRPr sz="1650">
                 <a:solidFill>
                   <a:srgbClr val="F7F7F2"/>
                 </a:solidFill>
@@ -5596,10 +5607,10 @@
                 <a:ea typeface="HarmonyOS Sans SC"/>
                 <a:cs typeface="HarmonyOS Sans SC"/>
               </a:defRPr>
-            </a:defPPr>
-            <a:lvl1pPr>
-              <a:buNone/>
-              <a:defRPr>
+            </a:lvl1pPr>
+            <a:lvl2pPr algn="l">
+              <a:buNone/>
+              <a:defRPr sz="1650">
                 <a:solidFill>
                   <a:srgbClr val="F7F7F2"/>
                 </a:solidFill>
@@ -5607,10 +5618,10 @@
                 <a:ea typeface="HarmonyOS Sans SC"/>
                 <a:cs typeface="HarmonyOS Sans SC"/>
               </a:defRPr>
-            </a:lvl1pPr>
-            <a:lvl2pPr>
-              <a:buNone/>
-              <a:defRPr>
+            </a:lvl2pPr>
+            <a:lvl3pPr algn="l">
+              <a:buNone/>
+              <a:defRPr sz="1650">
                 <a:solidFill>
                   <a:srgbClr val="F7F7F2"/>
                 </a:solidFill>
@@ -5618,10 +5629,10 @@
                 <a:ea typeface="HarmonyOS Sans SC"/>
                 <a:cs typeface="HarmonyOS Sans SC"/>
               </a:defRPr>
-            </a:lvl2pPr>
-            <a:lvl3pPr>
-              <a:buNone/>
-              <a:defRPr>
+            </a:lvl3pPr>
+            <a:lvl4pPr algn="l">
+              <a:buNone/>
+              <a:defRPr sz="1650">
                 <a:solidFill>
                   <a:srgbClr val="F7F7F2"/>
                 </a:solidFill>
@@ -5629,10 +5640,10 @@
                 <a:ea typeface="HarmonyOS Sans SC"/>
                 <a:cs typeface="HarmonyOS Sans SC"/>
               </a:defRPr>
-            </a:lvl3pPr>
-            <a:lvl4pPr>
-              <a:buNone/>
-              <a:defRPr>
+            </a:lvl4pPr>
+            <a:lvl5pPr algn="l">
+              <a:buNone/>
+              <a:defRPr sz="1650">
                 <a:solidFill>
                   <a:srgbClr val="F7F7F2"/>
                 </a:solidFill>
@@ -5640,10 +5651,10 @@
                 <a:ea typeface="HarmonyOS Sans SC"/>
                 <a:cs typeface="HarmonyOS Sans SC"/>
               </a:defRPr>
-            </a:lvl4pPr>
-            <a:lvl5pPr>
-              <a:buNone/>
-              <a:defRPr>
+            </a:lvl5pPr>
+            <a:lvl6pPr algn="l">
+              <a:buNone/>
+              <a:defRPr sz="1650">
                 <a:solidFill>
                   <a:srgbClr val="F7F7F2"/>
                 </a:solidFill>
@@ -5651,10 +5662,10 @@
                 <a:ea typeface="HarmonyOS Sans SC"/>
                 <a:cs typeface="HarmonyOS Sans SC"/>
               </a:defRPr>
-            </a:lvl5pPr>
-            <a:lvl6pPr>
-              <a:buNone/>
-              <a:defRPr>
+            </a:lvl6pPr>
+            <a:lvl7pPr algn="l">
+              <a:buNone/>
+              <a:defRPr sz="1650">
                 <a:solidFill>
                   <a:srgbClr val="F7F7F2"/>
                 </a:solidFill>
@@ -5662,10 +5673,10 @@
                 <a:ea typeface="HarmonyOS Sans SC"/>
                 <a:cs typeface="HarmonyOS Sans SC"/>
               </a:defRPr>
-            </a:lvl6pPr>
-            <a:lvl7pPr>
-              <a:buNone/>
-              <a:defRPr>
+            </a:lvl7pPr>
+            <a:lvl8pPr algn="l">
+              <a:buNone/>
+              <a:defRPr sz="1650">
                 <a:solidFill>
                   <a:srgbClr val="F7F7F2"/>
                 </a:solidFill>
@@ -5673,21 +5684,10 @@
                 <a:ea typeface="HarmonyOS Sans SC"/>
                 <a:cs typeface="HarmonyOS Sans SC"/>
               </a:defRPr>
-            </a:lvl7pPr>
-            <a:lvl8pPr>
-              <a:buNone/>
-              <a:defRPr>
-                <a:solidFill>
-                  <a:srgbClr val="F7F7F2"/>
-                </a:solidFill>
-                <a:latin typeface="HarmonyOS Sans SC"/>
-                <a:ea typeface="HarmonyOS Sans SC"/>
-                <a:cs typeface="HarmonyOS Sans SC"/>
-              </a:defRPr>
             </a:lvl8pPr>
-            <a:lvl9pPr>
-              <a:buNone/>
-              <a:defRPr>
+            <a:lvl9pPr algn="l">
+              <a:buNone/>
+              <a:defRPr sz="1650">
                 <a:solidFill>
                   <a:srgbClr val="F7F7F2"/>
                 </a:solidFill>
@@ -5698,14 +5698,14 @@
             </a:lvl9pPr>
           </a:lstStyle>
           <a:p xmlns:a="http://schemas.openxmlformats.org/drawingml/2006/main">
-            <a:pPr>
+            <a:pPr algn="l">
               <a:lnSpc>
                 <a:spcPct val="116000"/>
               </a:lnSpc>
               <a:buNone/>
-              <a:defRPr>
-                <a:solidFill>
-                  <a:srgbClr val="F7F7F2"/>
+              <a:defRPr sz="1650">
+                <a:solidFill>
+                  <a:srgbClr val="65E8D4"/>
                 </a:solidFill>
                 <a:latin typeface="HarmonyOS Sans SC"/>
                 <a:ea typeface="HarmonyOS Sans SC"/>
@@ -5713,7 +5713,7 @@
               </a:defRPr>
             </a:pPr>
             <a:r>
-              <a:rPr sz="1500" b="0" u="sng" strike="noStrike">
+              <a:rPr sz="1650" b="0" u="sng" strike="noStrike">
                 <a:solidFill>
                   <a:srgbClr val="65E8D4"/>
                 </a:solidFill>
@@ -5761,7 +5761,7 @@
         </p:blipFill>
         <p:spPr>
           <a:xfrm xmlns:a="http://schemas.openxmlformats.org/drawingml/2006/main">
-            <a:off x="609600" y="6524625"/>
+            <a:off x="609600" y="6400800"/>
             <a:ext cx="1952625" cy="228220"/>
           </a:xfrm>
           <a:prstGeom xmlns:a="http://schemas.openxmlformats.org/drawingml/2006/main" prst="rect">
@@ -5785,8 +5785,8 @@
         </p:nvSpPr>
         <p:spPr>
           <a:xfrm xmlns:a="http://schemas.openxmlformats.org/drawingml/2006/main">
-            <a:off x="11191875" y="6505575"/>
-            <a:ext cx="419100" cy="247650"/>
+            <a:off x="11163300" y="6400800"/>
+            <a:ext cx="419100" cy="228600"/>
           </a:xfrm>
           <a:prstGeom xmlns:a="http://schemas.openxmlformats.org/drawingml/2006/main" prst="rect">
             <a:avLst/>
@@ -5797,7 +5797,7 @@
           </a:ln>
         </p:spPr>
         <p:txBody>
-          <a:bodyPr xmlns:a="http://schemas.openxmlformats.org/drawingml/2006/main" wrap="none" lIns="0" tIns="0" rIns="0" bIns="0" anchor="ctr">
+          <a:bodyPr xmlns:a="http://schemas.openxmlformats.org/drawingml/2006/main" wrap="none" lIns="0" tIns="0" rIns="0" bIns="0" anchor="t">
             <a:noAutofit/>
           </a:bodyPr>
           <a:lstStyle xmlns:a="http://schemas.openxmlformats.org/drawingml/2006/main">
